--- a/Lessons/04_classification_and_metrics/Slides/classification_and_metrics_slides.pptx
+++ b/Lessons/04_classification_and_metrics/Slides/classification_and_metrics_slides.pptx
@@ -11995,7 +11995,7 @@
             <a:pPr lvl="0"/>
             <a:r>
               <a:rPr/>
-              <a:t>ROC, AUC, and where they mislead</a:t>
+              <a:t>ROC curves, the area under them, and where they mislead</a:t>
             </a:r>
           </a:p>
           <a:p>

--- a/Lessons/04_classification_and_metrics/Slides/classification_and_metrics_slides.pptx
+++ b/Lessons/04_classification_and_metrics/Slides/classification_and_metrics_slides.pptx
@@ -11995,7 +11995,7 @@
             <a:pPr lvl="0"/>
             <a:r>
               <a:rPr/>
-              <a:t>ROC curves, the area under them, and where they mislead</a:t>
+              <a:t>Receiver operating characteristic (ROC) curves, and where they mislead</a:t>
             </a:r>
           </a:p>
           <a:p>

--- a/Lessons/04_classification_and_metrics/Slides/classification_and_metrics_slides.pptx
+++ b/Lessons/04_classification_and_metrics/Slides/classification_and_metrics_slides.pptx
@@ -11241,8 +11241,8 @@
         </p:blipFill>
         <p:spPr bwMode="auto">
           <a:xfrm>
-            <a:off x="645496" y="1166099"/>
-            <a:ext cx="7853007" cy="3360181"/>
+            <a:off x="632911" y="1166099"/>
+            <a:ext cx="7878177" cy="3360181"/>
           </a:xfrm>
           <a:prstGeom prst="rect">
             <a:avLst/>

--- a/Lessons/04_classification_and_metrics/Slides/classification_and_metrics_slides.pptx
+++ b/Lessons/04_classification_and_metrics/Slides/classification_and_metrics_slides.pptx
@@ -572,7 +572,7 @@
             </a:pPr>
             <a:r>
               <a:rPr/>
-              <a:t>Collect exercise 3. If you have looked at any of it, name the recurring mistake rather than praising the good answers — it is worth more to the room.</a:t>
+              <a:t>Collect exercise 3. If you have looked at any of it, name the recurring mistake rather than praising the good answers - it is worth more to the room.</a:t>
             </a:r>
           </a:p>
           <a:p>
@@ -682,7 +682,7 @@
             </a:pPr>
             <a:r>
               <a:rPr/>
-              <a:t>Go down the column. Everything is close. Nothing is exact, and say why — 6,000 training drives carrying 230 failures is a modest amount of evidence, and 230 is the number that matters, not 6,000.</a:t>
+              <a:t>Go down the column. Everything is close. Nothing is exact, and say why - 6,000 training drives carrying 230 failures is a modest amount of evidence, and 230 is the number that matters, not 6,000.</a:t>
             </a:r>
           </a:p>
           <a:p>
@@ -806,7 +806,7 @@
             </a:pPr>
             <a:r>
               <a:rPr/>
-              <a:t>An average drive has a 0.2% chance of failing in thirty days. For the model to reach an even bet — probability one half, log-odds zero — the evidence has to move the log-odds by more than six. Only badly degraded drives manage that.</a:t>
+              <a:t>An average drive has a 0.2% chance of failing in thirty days. For the model to reach an even bet - probability one half, log-odds zero - the evidence has to move the log-odds by more than six. Only badly degraded drives manage that.</a:t>
             </a:r>
           </a:p>
           <a:p>
@@ -1026,7 +1026,7 @@
             </a:pPr>
             <a:r>
               <a:rPr/>
-              <a:t>Two practical notes worth saying aloud. We take the logarithm because it turns the product into a sum, which differentiates one term at a time — and because with 8,000 factors below 1 the product is about 10 to the minus 1000, which a 64-bit float stores as exactly zero. Every real implementation works in log space, and not for elegance.</a:t>
+              <a:t>Two practical notes worth saying aloud. We take the logarithm because it turns the product into a sum, which differentiates one term at a time - and because with 8,000 factors below 1 the product is about 10 to the minus 1000, which a 64-bit float stores as exactly zero. Every real implementation works in log space, and not for elegance.</a:t>
             </a:r>
           </a:p>
           <a:p>
@@ -1122,7 +1122,7 @@
             </a:pPr>
             <a:r>
               <a:rPr/>
-              <a:t>Do not derive it here — the handout, section 3, does it in full. Show it and read it.</a:t>
+              <a:t>Do not derive it here - the handout, section 3, does it in full. Show it and read it.</a:t>
             </a:r>
           </a:p>
           <a:p>
@@ -1274,7 +1274,7 @@
             </a:pPr>
             <a:r>
               <a:rPr/>
-              <a:t>If someone asks whether that is a coincidence: no. Both are generalised linear models fitted by maximum likelihood — Gaussian noise for regression, Bernoulli outcomes for classification — and the whole exponential family gives this form. They do not need that theory to use either method, but it is why the same gradient descent code, unchanged, trains both.</a:t>
+              <a:t>If someone asks whether that is a coincidence: no. Both are generalised linear models fitted by maximum likelihood - Gaussian noise for regression, Bernoulli outcomes for classification - and the whole exponential family gives this form. They do not need that theory to use either method, but it is why the same gradient descent code, unchanged, trains both.</a:t>
             </a:r>
           </a:p>
         </p:txBody>
@@ -1356,21 +1356,21 @@
             </a:pPr>
             <a:r>
               <a:rPr/>
-              <a:t>Left panel, the costs. A drive failed and the model said 0.0001. Squared error charges 0.9998. An honest “don’t know” — 0.5 — costs 0.25. So the worst possible answer is four times worse than a shrug. Log loss charges 9.2 against 0.69, and the ratio grows without bound.</a:t>
-            </a:r>
-          </a:p>
-          <a:p>
-            <a:pPr lvl="0" indent="0" marL="0">
-              <a:buNone/>
-            </a:pPr>
-          </a:p>
-          <a:p>
-            <a:pPr lvl="0" indent="0" marL="0">
-              <a:buNone/>
-            </a:pPr>
-            <a:r>
-              <a:rPr/>
-              <a:t>Right panel is the real argument, so spend the time here. The gradient is what the optimiser actually uses. Squared error’s gradient through the sigmoid carries a factor p times one-minus-p — which is exactly the sigmoid derivative from ten minutes ago — and that factor goes to zero as p goes to zero.</a:t>
+              <a:t>Left panel, the costs. A drive failed and the model said 0.0001. Squared error charges 0.9998. An honest “don’t know” - 0.5 - costs 0.25. So the worst possible answer is four times worse than a shrug. Log loss charges 9.2 against 0.69, and the ratio grows without bound.</a:t>
+            </a:r>
+          </a:p>
+          <a:p>
+            <a:pPr lvl="0" indent="0" marL="0">
+              <a:buNone/>
+            </a:pPr>
+          </a:p>
+          <a:p>
+            <a:pPr lvl="0" indent="0" marL="0">
+              <a:buNone/>
+            </a:pPr>
+            <a:r>
+              <a:rPr/>
+              <a:t>Right panel is the real argument, so spend the time here. The gradient is what the optimiser actually uses. Squared error’s gradient through the sigmoid carries a factor p times one-minus-p - which is exactly the sigmoid derivative from ten minutes ago - and that factor goes to zero as p goes to zero.</a:t>
             </a:r>
           </a:p>
           <a:p>
@@ -1398,7 +1398,7 @@
             </a:pPr>
             <a:r>
               <a:rPr/>
-              <a:t>That is the failure. Not that squared error scores badly — that it stops teaching.</a:t>
+              <a:t>That is the failure. Not that squared error scores badly - that it stops teaching.</a:t>
             </a:r>
           </a:p>
         </p:txBody>
@@ -1508,7 +1508,7 @@
             </a:pPr>
             <a:r>
               <a:rPr/>
-              <a:t>Now the caution that catches people, and it is worth ten seconds because they will hit it in the notebook. Convex does NOT mean there is a closed-form solution. Setting the gradient to zero gives X-transpose times sigma of Xw minus y equals zero, which is not linear in w — the sigmoid is in the way.</a:t>
+              <a:t>Now the caution that catches people, and it is worth ten seconds because they will hit it in the notebook. Convex does NOT mean there is a closed-form solution. Setting the gradient to zero gives X-transpose times sigma of Xw minus y equals zero, which is not linear in w - the sigmoid is in the way.</a:t>
             </a:r>
           </a:p>
           <a:p>
@@ -1618,7 +1618,7 @@
             </a:pPr>
             <a:r>
               <a:rPr/>
-              <a:t>The linear-fit failure — let them see 3,606 negative probabilities printed rather than being told.</a:t>
+              <a:t>The linear-fit failure - let them see 3,606 negative probabilities printed rather than being told.</a:t>
             </a:r>
           </a:p>
           <a:p>
@@ -1660,7 +1660,7 @@
             </a:pPr>
             <a:r>
               <a:rPr/>
-              <a:t>If time is short, skip the descent curve — it is the least surprising cell and they saw the same picture in lesson 3.</a:t>
+              <a:t>If time is short, skip the descent curve - it is the least surprising cell and they saw the same picture in lesson 3.</a:t>
             </a:r>
           </a:p>
         </p:txBody>
@@ -1742,7 +1742,7 @@
             </a:pPr>
             <a:r>
               <a:rPr/>
-              <a:t>Two features, so the model can be drawn. The black line is where the predicted probability is exactly 0.5 — equivalently, where the log-odds are zero.</a:t>
+              <a:t>Two features, so the model can be drawn. The black line is where the predicted probability is exactly 0.5 - equivalently, where the log-odds are zero.</a:t>
             </a:r>
           </a:p>
           <a:p>
@@ -1770,7 +1770,7 @@
             </a:pPr>
             <a:r>
               <a:rPr/>
-              <a:t>Second observation, and this is the bridge to the rest of the lesson: almost every gold point — every drive that actually failed — is on the blue side of the line. At a threshold of 0.5 this model calls nearly the whole fleet healthy, including most of the drives that failed.</a:t>
+              <a:t>Second observation, and this is the bridge to the rest of the lesson: almost every gold point - every drive that actually failed - is on the blue side of the line. At a threshold of 0.5 this model calls nearly the whole fleet healthy, including most of the drives that failed.</a:t>
             </a:r>
           </a:p>
           <a:p>
@@ -1880,7 +1880,7 @@
             </a:pPr>
             <a:r>
               <a:rPr/>
-              <a:t>That is not padding. Fitting a classifier is one line of scikit-learn. Deciding whether the thing you fitted is any good, and reporting that honestly, is where the difficulty actually lives — and it is where working data scientists most often get it wrong in public.</a:t>
+              <a:t>That is not padding. Fitting a classifier is one line of scikit-learn. Deciding whether the thing you fitted is any good, and reporting that honestly, is where the difficulty actually lives - and it is where working data scientists most often get it wrong in public.</a:t>
             </a:r>
           </a:p>
           <a:p>
@@ -2082,7 +2082,7 @@
             </a:r>
             <a:r>
               <a:rPr/>
-              <a:t> — no learning, no data, no features — scores 96.20%. The model they just built, which finds more than half the failing drives, scores 97.70%. One and a half percentage points separate a real model from a worthless one.</a:t>
+              <a:t> - no learning, no data, no features - scores 96.20%. The model they just built, which finds more than half the failing drives, scores 97.70%. One and a half percentage points separate a real model from a worthless one.</a:t>
             </a:r>
           </a:p>
           <a:p>
@@ -2192,7 +2192,7 @@
             </a:pPr>
             <a:r>
               <a:rPr/>
-              <a:t>Be careful to defend the instinct rather than mock it. Accuracy is not a naive metric, and students who reached for it were not being lazy — on a balanced problem it is the correct summary and everything else is a complication.</a:t>
+              <a:t>Be careful to defend the instinct rather than mock it. Accuracy is not a naive metric, and students who reached for it were not being lazy - on a balanced problem it is the correct summary and everything else is a complication.</a:t>
             </a:r>
           </a:p>
           <a:p>
@@ -2330,7 +2330,7 @@
             </a:pPr>
             <a:r>
               <a:rPr/>
-              <a:t>Side by side, the two models are obviously not comparable — and the number that separates them, 0 caught against 43, is nowhere in the accuracy figure.</a:t>
+              <a:t>Side by side, the two models are obviously not comparable - and the number that separates them, 0 caught against 43, is nowhere in the accuracy figure.</a:t>
             </a:r>
           </a:p>
           <a:p>
@@ -2440,7 +2440,7 @@
             </a:pPr>
             <a:r>
               <a:rPr/>
-              <a:t>The names are jargon until they are attached to consequences, so attach them here and keep the numbers visible — they come back at the end of the lesson when we choose a threshold.</a:t>
+              <a:t>The names are jargon until they are attached to consequences, so attach them here and keep the numbers visible - they come back at the end of the lesson when we choose a threshold.</a:t>
             </a:r>
           </a:p>
           <a:p>
@@ -2468,7 +2468,7 @@
             </a:pPr>
             <a:r>
               <a:rPr/>
-              <a:t>Ask for a domain where the ratio goes the other way — where a false positive is the expensive one. Medical screening that triggers an invasive biopsy is the usual answer; content moderation that removes a legitimate post is another.</a:t>
+              <a:t>Ask for a domain where the ratio goes the other way - where a false positive is the expensive one. Medical screening that triggers an invasive biopsy is the usual answer; content moderation that removes a legitimate post is another.</a:t>
             </a:r>
           </a:p>
         </p:txBody>
@@ -2564,21 +2564,21 @@
             </a:pPr>
             <a:r>
               <a:rPr/>
-              <a:t>Precision divides by the COLUMN — everything we flagged. When this model raises an alarm, how often is it right? That is the technician’s question: how much of my time are you wasting?</a:t>
-            </a:r>
-          </a:p>
-          <a:p>
-            <a:pPr lvl="0" indent="0" marL="0">
-              <a:buNone/>
-            </a:pPr>
-          </a:p>
-          <a:p>
-            <a:pPr lvl="0" indent="0" marL="0">
-              <a:buNone/>
-            </a:pPr>
-            <a:r>
-              <a:rPr/>
-              <a:t>Recall divides by the ROW — everything that actually failed. Of the drives that were going to fail, how many did we find? That is the operations manager’s question: how exposed am I still?</a:t>
+              <a:t>Precision divides by the COLUMN - everything we flagged. When this model raises an alarm, how often is it right? That is the technician’s question: how much of my time are you wasting?</a:t>
+            </a:r>
+          </a:p>
+          <a:p>
+            <a:pPr lvl="0" indent="0" marL="0">
+              <a:buNone/>
+            </a:pPr>
+          </a:p>
+          <a:p>
+            <a:pPr lvl="0" indent="0" marL="0">
+              <a:buNone/>
+            </a:pPr>
+            <a:r>
+              <a:rPr/>
+              <a:t>Recall divides by the ROW - everything that actually failed. Of the drives that were going to fail, how many did we find? That is the operations manager’s question: how exposed am I still?</a:t>
             </a:r>
           </a:p>
           <a:p>
@@ -2784,7 +2784,7 @@
             </a:pPr>
             <a:r>
               <a:rPr/>
-              <a:t>Take the stupidest possible model — flag every single drive — and score it. Recall is a perfect 1.0. Precision is 0.038.</a:t>
+              <a:t>Take the stupidest possible model - flag every single drive - and score it. Recall is a perfect 1.0. Precision is 0.038.</a:t>
             </a:r>
           </a:p>
           <a:p>
@@ -2936,7 +2936,7 @@
             </a:pPr>
             <a:r>
               <a:rPr/>
-              <a:t>The weighted average weights each class by how common it is, so on this problem it is essentially the healthy class talking, and it reads close to accuracy — inheriting exactly the blindness we spent twenty minutes on.</a:t>
+              <a:t>The weighted average weights each class by how common it is, so on this problem it is essentially the healthy class talking, and it reads close to accuracy - inheriting exactly the blindness we spent twenty minutes on.</a:t>
             </a:r>
           </a:p>
           <a:p>
@@ -2964,7 +2964,7 @@
             </a:pPr>
             <a:r>
               <a:rPr/>
-              <a:t>The rule: on an imbalanced problem, quote the macro average or the minority class directly. Reporting the weighted average is not incorrect — it is the number that makes a mediocre model look finished, and choosing it without saying so is how a result gets oversold.</a:t>
+              <a:t>The rule: on an imbalanced problem, quote the macro average or the minority class directly. Reporting the weighted average is not incorrect - it is the number that makes a mediocre model look finished, and choosing it without saying so is how a result gets oversold.</a:t>
             </a:r>
           </a:p>
         </p:txBody>
@@ -3074,7 +3074,7 @@
             </a:pPr>
             <a:r>
               <a:rPr/>
-              <a:t>The cell to linger on is the threshold sweep table. Do not explain it first — let them read the columns and say what they see. Somebody will notice that accuracy barely moves. That is the moment to make the next slide.</a:t>
+              <a:t>The cell to linger on is the threshold sweep table. Do not explain it first - let them read the columns and say what they see. Somebody will notice that accuracy barely moves. That is the moment to make the next slide.</a:t>
             </a:r>
           </a:p>
         </p:txBody>
@@ -3404,7 +3404,7 @@
             </a:pPr>
             <a:r>
               <a:rPr/>
-              <a:t>Now the accuracy column, which is the slide’s real argument. From 0.10 upwards it moves by three percentage points while recall falls from 0.80 to 0.18. And its maximum is at 0.5 — the threshold that misses 33 of the 76 failures.</a:t>
+              <a:t>Now the accuracy column, which is the slide’s real argument. From 0.10 upwards it moves by three percentage points while recall falls from 0.80 to 0.18. And its maximum is at 0.5 - the threshold that misses 33 of the 76 failures.</a:t>
             </a:r>
           </a:p>
           <a:p>
@@ -3514,7 +3514,7 @@
             </a:pPr>
             <a:r>
               <a:rPr/>
-              <a:t>The part to teach is the baseline. A model with random scores has precision equal to the positive rate — 0.038 here — at every recall. That flat red line, not 0.5, is what “no skill” looks like on an imbalanced problem.</a:t>
+              <a:t>The part to teach is the baseline. A model with random scores has precision equal to the positive rate - 0.038 here - at every recall. That flat red line, not 0.5, is what “no skill” looks like on an imbalanced problem.</a:t>
             </a:r>
           </a:p>
           <a:p>
@@ -3638,7 +3638,7 @@
             </a:pPr>
             <a:r>
               <a:rPr/>
-              <a:t>Everything so far has needed a threshold. That is fine when you know the costs, and we will come back to it. But often you want to compare two models before committing — is model A better than model B, at any operating point?</a:t>
+              <a:t>Everything so far has needed a threshold. That is fine when you know the costs, and we will come back to it. But often you want to compare two models before committing - is model A better than model B, at any operating point?</a:t>
             </a:r>
           </a:p>
           <a:p>
@@ -3734,21 +3734,21 @@
             </a:pPr>
             <a:r>
               <a:rPr/>
-              <a:t>Receiver operating characteristic — expand it, and say where the name comes from, because it makes the idea concrete. Wartime radar: operators tuning receivers to spot aircraft without chasing flocks of birds. Same problem shape, literally the same trade-off.</a:t>
-            </a:r>
-          </a:p>
-          <a:p>
-            <a:pPr lvl="0" indent="0" marL="0">
-              <a:buNone/>
-            </a:pPr>
-          </a:p>
-          <a:p>
-            <a:pPr lvl="0" indent="0" marL="0">
-              <a:buNone/>
-            </a:pPr>
-            <a:r>
-              <a:rPr/>
-              <a:t>The two axes: true positive rate, which is recall under another name — the failures we catch. False positive rate — the healthy drives we condemn.</a:t>
+              <a:t>Receiver operating characteristic - expand it, and say where the name comes from, because it makes the idea concrete. Wartime radar: operators tuning receivers to spot aircraft without chasing flocks of birds. Same problem shape, literally the same trade-off.</a:t>
+            </a:r>
+          </a:p>
+          <a:p>
+            <a:pPr lvl="0" indent="0" marL="0">
+              <a:buNone/>
+            </a:pPr>
+          </a:p>
+          <a:p>
+            <a:pPr lvl="0" indent="0" marL="0">
+              <a:buNone/>
+            </a:pPr>
+            <a:r>
+              <a:rPr/>
+              <a:t>The two axes: true positive rate, which is recall under another name - the failures we catch. False positive rate - the healthy drives we condemn.</a:t>
             </a:r>
           </a:p>
           <a:p>
@@ -3996,21 +3996,21 @@
             </a:pPr>
             <a:r>
               <a:rPr/>
-              <a:t>Divide all the probabilities by ten and the ranking is identical, so the AUC is identical — while the model is now badly calibrated and every threshold-based decision it makes is different.</a:t>
-            </a:r>
-          </a:p>
-          <a:p>
-            <a:pPr lvl="0" indent="0" marL="0">
-              <a:buNone/>
-            </a:pPr>
-          </a:p>
-          <a:p>
-            <a:pPr lvl="0" indent="0" marL="0">
-              <a:buNone/>
-            </a:pPr>
-            <a:r>
-              <a:rPr/>
-              <a:t>The consequence: AUC says nothing about whether “0.7” means anything. If you need the probabilities to be believable — because you are computing expected costs, as we will in ten minutes — AUC is not the check you want.</a:t>
+              <a:t>Divide all the probabilities by ten and the ranking is identical, so the AUC is identical - while the model is now badly calibrated and every threshold-based decision it makes is different.</a:t>
+            </a:r>
+          </a:p>
+          <a:p>
+            <a:pPr lvl="0" indent="0" marL="0">
+              <a:buNone/>
+            </a:pPr>
+          </a:p>
+          <a:p>
+            <a:pPr lvl="0" indent="0" marL="0">
+              <a:buNone/>
+            </a:pPr>
+            <a:r>
+              <a:rPr/>
+              <a:t>The consequence: AUC says nothing about whether “0.7” means anything. If you need the probabilities to be believable - because you are computing expected costs, as we will in ten minutes - AUC is not the check you want.</a:t>
             </a:r>
           </a:p>
           <a:p>
@@ -4106,7 +4106,7 @@
             </a:pPr>
             <a:r>
               <a:rPr/>
-              <a:t>Same model. Not retrained. We keep every healthy drive in a fleet of 60,000 and thin the FAILURES until they are 0.4% instead of 3.8% — the direction reality moves in fraud, disease, hardware failure.</a:t>
+              <a:t>Same model. Not retrained. We keep every healthy drive in a fleet of 60,000 and thin the FAILURES until they are 0.4% instead of 3.8% - the direction reality moves in fraud, disease, hardware failure.</a:t>
             </a:r>
           </a:p>
           <a:p>
@@ -4134,7 +4134,7 @@
             </a:pPr>
             <a:r>
               <a:rPr/>
-              <a:t>Right: the precision-recall curves are in three different worlds. Average precision falls from 0.706 to 0.361, and precision at the same threshold falls from 0.79 to 0.26 — two alarms in three now false.</a:t>
+              <a:t>Right: the precision-recall curves are in three different worlds. Average precision falls from 0.706 to 0.361, and precision at the same threshold falls from 0.79 to 0.26 - two alarms in three now false.</a:t>
             </a:r>
           </a:p>
           <a:p>
@@ -4244,7 +4244,7 @@
             </a:pPr>
             <a:r>
               <a:rPr/>
-              <a:t>A thousand false alarms among a hundred thousand healthy drives is a false positive rate of 0.01 — invisible on the ROC axis, a rounding error. The same thousand false alarms, set against the alarms actually raised, may be most of them.</a:t>
+              <a:t>A thousand false alarms among a hundred thousand healthy drives is a false positive rate of 0.01 - invisible on the ROC axis, a rounding error. The same thousand false alarms, set against the alarms actually raised, may be most of them.</a:t>
             </a:r>
           </a:p>
           <a:p>
@@ -4368,7 +4368,7 @@
             </a:pPr>
             <a:r>
               <a:rPr/>
-              <a:t>If someone asks which single number to use when a single number is demanded: average precision, because its baseline moves with the problem. But push back on the premise — the reason to demand a single number is usually to avoid thinking, and this lesson is about the thinking.</a:t>
+              <a:t>If someone asks which single number to use when a single number is demanded: average precision, because its baseline moves with the problem. But push back on the premise - the reason to demand a single number is usually to avoid thinking, and this lesson is about the thinking.</a:t>
             </a:r>
           </a:p>
         </p:txBody>
@@ -4450,21 +4450,21 @@
             </a:pPr>
             <a:r>
               <a:rPr/>
-              <a:t>SMART is the diagnostic data a drive keeps about itself: reallocated sectors, spin retries, read error rate, temperature, hours in service. Expand the acronym on the slide and out loud — it is the kind of thing that gets skipped and then quietly blocks a student for the rest of the hour.</a:t>
-            </a:r>
-          </a:p>
-          <a:p>
-            <a:pPr lvl="0" indent="0" marL="0">
-              <a:buNone/>
-            </a:pPr>
-          </a:p>
-          <a:p>
-            <a:pPr lvl="0" indent="0" marL="0">
-              <a:buNone/>
-            </a:pPr>
-            <a:r>
-              <a:rPr/>
-              <a:t>The data is synthetic, and say why: the coefficients that generated the labels are written down in disk_data.py. Same argument as lesson 3 — a real dataset lets you admire an estimate, a synthetic one lets you check it.</a:t>
+              <a:t>SMART is the diagnostic data a drive keeps about itself: reallocated sectors, spin retries, read error rate, temperature, hours in service. Expand the acronym on the slide and out loud - it is the kind of thing that gets skipped and then quietly blocks a student for the rest of the hour.</a:t>
+            </a:r>
+          </a:p>
+          <a:p>
+            <a:pPr lvl="0" indent="0" marL="0">
+              <a:buNone/>
+            </a:pPr>
+          </a:p>
+          <a:p>
+            <a:pPr lvl="0" indent="0" marL="0">
+              <a:buNone/>
+            </a:pPr>
+            <a:r>
+              <a:rPr/>
+              <a:t>The data is synthetic, and say why: the coefficients that generated the labels are written down in disk_data.py. Same argument as lesson 3 - a real dataset lets you admire an estimate, a synthetic one lets you check it.</a:t>
             </a:r>
           </a:p>
           <a:p>
@@ -4560,7 +4560,7 @@
             </a:pPr>
             <a:r>
               <a:rPr/>
-              <a:t>Finally, the honest way to pick a threshold. It needs one ingredient no metric can supply: what the errors cost. We wrote those down an hour ago — €140 for a needless replacement, €2,600 for a drive that dies in service.</a:t>
+              <a:t>Finally, the honest way to pick a threshold. It needs one ingredient no metric can supply: what the errors cost. We wrote those down an hour ago - €140 for a needless replacement, €2,600 for a drive that dies in service.</a:t>
             </a:r>
           </a:p>
           <a:p>
@@ -4836,7 +4836,7 @@
             </a:pPr>
             <a:r>
               <a:rPr/>
-              <a:t>Done properly: choose the threshold on a validation set, then measure once on test. Lesson 5 builds exactly that machinery, and this is the concrete reason it is needed — not a hygiene rule, a thing that changes the number you report.</a:t>
+              <a:t>Done properly: choose the threshold on a validation set, then measure once on test. Lesson 5 builds exactly that machinery, and this is the concrete reason it is needed - not a hygiene rule, a thing that changes the number you report.</a:t>
             </a:r>
           </a:p>
           <a:p>
@@ -4946,7 +4946,7 @@
             </a:pPr>
             <a:r>
               <a:rPr/>
-              <a:t>Point at the AUC column: 0.949 against 0.950. Reweighting taught the model essentially nothing new about disk failure. What it did was move where the model puts its 0.5 line — the same lever as the threshold, pulled at a different moment.</a:t>
+              <a:t>Point at the AUC column: 0.949 against 0.950. Reweighting taught the model essentially nothing new about disk failure. What it did was move where the model puts its 0.5 line - the same lever as the threshold, pulled at a different moment.</a:t>
             </a:r>
           </a:p>
           <a:p>
@@ -4988,7 +4988,7 @@
             </a:pPr>
             <a:r>
               <a:rPr/>
-              <a:t>Same caution for resampling and SMOTE — and it must happen inside the cross-validation fold, for the reasons lesson 2 gave about imputation.</a:t>
+              <a:t>Same caution for resampling and SMOTE - and it must happen inside the cross-validation fold, for the reasons lesson 2 gave about imputation.</a:t>
             </a:r>
           </a:p>
         </p:txBody>
@@ -5180,21 +5180,21 @@
             </a:pPr>
             <a:r>
               <a:rPr/>
-              <a:t>For K classes the model produces one score per class and normalises them — the softmax, which for two classes reduces exactly to the sigmoid. The cost generalises to categorical cross-entropy, and it is the same idea: the negative log of the probability assigned to what actually happened. Handout section 10.</a:t>
-            </a:r>
-          </a:p>
-          <a:p>
-            <a:pPr lvl="0" indent="0" marL="0">
-              <a:buNone/>
-            </a:pPr>
-          </a:p>
-          <a:p>
-            <a:pPr lvl="0" indent="0" marL="0">
-              <a:buNone/>
-            </a:pPr>
-            <a:r>
-              <a:rPr/>
-              <a:t>Read the off-diagonal cells rather than the accuracy. Degraded is the hard class, and understandably — it sits between two neighbours that both look like it from a distance.</a:t>
+              <a:t>For K classes the model produces one score per class and normalises them - the softmax, which for two classes reduces exactly to the sigmoid. The cost generalises to categorical cross-entropy, and it is the same idea: the negative log of the probability assigned to what actually happened. Handout section 10.</a:t>
+            </a:r>
+          </a:p>
+          <a:p>
+            <a:pPr lvl="0" indent="0" marL="0">
+              <a:buNone/>
+            </a:pPr>
+          </a:p>
+          <a:p>
+            <a:pPr lvl="0" indent="0" marL="0">
+              <a:buNone/>
+            </a:pPr>
+            <a:r>
+              <a:rPr/>
+              <a:t>Read the off-diagonal cells rather than the accuracy. Degraded is the hard class, and understandably - it sits between two neighbours that both look like it from a distance.</a:t>
             </a:r>
           </a:p>
           <a:p>
@@ -5304,7 +5304,7 @@
             </a:pPr>
             <a:r>
               <a:rPr/>
-              <a:t>Macro treats the three conditions as equally important. Weighted lets the healthy class — five drives in six — do most of the talking.</a:t>
+              <a:t>Macro treats the three conditions as equally important. Weighted lets the healthy class - five drives in six - do most of the talking.</a:t>
             </a:r>
           </a:p>
           <a:p>
@@ -5428,7 +5428,7 @@
             </a:pPr>
             <a:r>
               <a:rPr/>
-              <a:t>The second thing: every metric on the slide depended on a threshold, and the threshold has an answer — C-FP over C-FP plus C-FN — that comes from the business, not from the data.</a:t>
+              <a:t>The second thing: every metric on the slide depended on a threshold, and the threshold has an answer - C-FP over C-FP plus C-FN - that comes from the business, not from the data.</a:t>
             </a:r>
           </a:p>
         </p:txBody>
@@ -5662,7 +5662,7 @@
             </a:pPr>
             <a:r>
               <a:rPr/>
-              <a:t>Somebody will say “healthy, every time”. Agree, and move on. Do not explain the consequence yet — it lands far harder in section 5 when they see 96.2% printed as a model’s accuracy score.</a:t>
+              <a:t>Somebody will say “healthy, every time”. Agree, and move on. Do not explain the consequence yet - it lands far harder in section 5 when they see 96.2% printed as a model’s accuracy score.</a:t>
             </a:r>
           </a:p>
         </p:txBody>
@@ -5758,7 +5758,7 @@
             </a:pPr>
             <a:r>
               <a:rPr/>
-              <a:t>The left panel: the fitted line gives a NEGATIVE probability to 3,606 of the 8,000 drives — 45% of the fleet. Not a small negative number. A negative probability. And extend it slightly past the data, to 32 reallocated sectors, and it predicts more than 1.</a:t>
+              <a:t>The left panel: the fitted line gives a NEGATIVE probability to 3,606 of the 8,000 drives - 45% of the fleet. Not a small negative number. A negative probability. And extend it slightly past the data, to 32 reallocated sectors, and it predicts more than 1.</a:t>
             </a:r>
           </a:p>
           <a:p>
@@ -5868,21 +5868,21 @@
             </a:pPr>
             <a:r>
               <a:rPr/>
-              <a:t>Left: the curve. Steep in the middle, flat at both ends. Make the case that the flatness is the right behaviour, not a compromise — going from 0 to 4 reallocated sectors should change your mind a lot; going from 40 to 44 should barely register, because you had already concluded the drive was finished. Evidence has diminishing returns.</a:t>
-            </a:r>
-          </a:p>
-          <a:p>
-            <a:pPr lvl="0" indent="0" marL="0">
-              <a:buNone/>
-            </a:pPr>
-          </a:p>
-          <a:p>
-            <a:pPr lvl="0" indent="0" marL="0">
-              <a:buNone/>
-            </a:pPr>
-            <a:r>
-              <a:rPr/>
-              <a:t>Right: the same relationship inverted. This is the slide that explains WHY this particular curve and not some other S-shape. A probability is trapped in [0,1]. The odds — p over 1 minus p — remove the ceiling. The log of the odds removes the floor too, leaving something that runs over all of the real line.</a:t>
+              <a:t>Left: the curve. Steep in the middle, flat at both ends. Make the case that the flatness is the right behaviour, not a compromise - going from 0 to 4 reallocated sectors should change your mind a lot; going from 40 to 44 should barely register, because you had already concluded the drive was finished. Evidence has diminishing returns.</a:t>
+            </a:r>
+          </a:p>
+          <a:p>
+            <a:pPr lvl="0" indent="0" marL="0">
+              <a:buNone/>
+            </a:pPr>
+          </a:p>
+          <a:p>
+            <a:pPr lvl="0" indent="0" marL="0">
+              <a:buNone/>
+            </a:pPr>
+            <a:r>
+              <a:rPr/>
+              <a:t>Right: the same relationship inverted. This is the slide that explains WHY this particular curve and not some other S-shape. A probability is trapped in [0,1]. The odds - p over 1 minus p - remove the ceiling. The log of the odds removes the floor too, leaving something that runs over all of the real line.</a:t>
             </a:r>
           </a:p>
           <a:p>
@@ -5992,7 +5992,7 @@
             </a:pPr>
             <a:r>
               <a:rPr/>
-              <a:t>Name the three properties we will use, without deriving them here — the handout section 2.2 does that: sigma of 0 is a half; sigma of minus z is 1 minus sigma of z; and the derivative is sigma times one minus sigma.</a:t>
+              <a:t>Name the three properties we will use, without deriving them here - the handout section 2.2 does that: sigma of 0 is a half; sigma of minus z is 1 minus sigma of z; and the derivative is sigma times one minus sigma.</a:t>
             </a:r>
           </a:p>
           <a:p>
@@ -6102,21 +6102,21 @@
             </a:pPr>
             <a:r>
               <a:rPr/>
-              <a:t>Now the mistake they will make, and it is a reasonable one. They will read “six times the odds” as “six times as likely”. For rare events those are nearly the same number, so here it is almost right — which is exactly why the habit survives until it does damage.</a:t>
-            </a:r>
-          </a:p>
-          <a:p>
-            <a:pPr lvl="0" indent="0" marL="0">
-              <a:buNone/>
-            </a:pPr>
-          </a:p>
-          <a:p>
-            <a:pPr lvl="0" indent="0" marL="0">
-              <a:buNone/>
-            </a:pPr>
-            <a:r>
-              <a:rPr/>
-              <a:t>Give them the counterexample out loud: odds of 9, a probability of 0.90, multiplied by 5 gives odds of 45 — a probability of 0.978. The odds went up fivefold; the probability moved eight points. Odds ratios multiply odds.</a:t>
+              <a:t>Now the mistake they will make, and it is a reasonable one. They will read “six times the odds” as “six times as likely”. For rare events those are nearly the same number, so here it is almost right - which is exactly why the habit survives until it does damage.</a:t>
+            </a:r>
+          </a:p>
+          <a:p>
+            <a:pPr lvl="0" indent="0" marL="0">
+              <a:buNone/>
+            </a:pPr>
+          </a:p>
+          <a:p>
+            <a:pPr lvl="0" indent="0" marL="0">
+              <a:buNone/>
+            </a:pPr>
+            <a:r>
+              <a:rPr/>
+              <a:t>Give them the counterexample out loud: odds of 9, a probability of 0.90, multiplied by 5 gives odds of 45 - a probability of 0.978. The odds went up fivefold; the probability moved eight points. Odds ratios multiply odds.</a:t>
             </a:r>
           </a:p>
         </p:txBody>
@@ -9189,7 +9189,7 @@
             </a:pPr>
             <a:r>
               <a:rPr/>
-              <a:t>Lesson 4 — Classification and Evaluation Metrics</a:t>
+              <a:t>Lesson 4: Classification and Evaluation Metrics</a:t>
             </a:r>
           </a:p>
         </p:txBody>
@@ -9225,7 +9225,7 @@
             <a:br/>
             <a:r>
               <a:rPr/>
-              <a:t>Fabio Antonini — Università degli Studi dell’Aquila</a:t>
+              <a:t>Fabio Antonini, Università degli Studi dell’Aquila</a:t>
             </a:r>
           </a:p>
         </p:txBody>
@@ -9982,7 +9982,7 @@
             <a:pPr lvl="0"/>
             <a:r>
               <a:rPr/>
-              <a:t>σ(-6.09) = 0.0023 — a 0.2% chance for an average drive</a:t>
+              <a:t>σ(-6.09) = 0.0023: a 0.2% chance for an average drive</a:t>
             </a:r>
           </a:p>
         </p:txBody>
@@ -10034,7 +10034,7 @@
             </a:pPr>
             <a:r>
               <a:rPr/>
-              <a:t>Fitting means minimising something — but what?</a:t>
+              <a:t>Fitting means minimising something, but what?</a:t>
             </a:r>
           </a:p>
         </p:txBody>
@@ -11334,7 +11334,7 @@
             </a:r>
             <a:r>
               <a:rPr/>
-              <a:t> — we replace a healthy drive. A technician’s hour, €140</a:t>
+              <a:t>: we replace a healthy drive. A technician’s hour, €140</a:t>
             </a:r>
           </a:p>
           <a:p>
@@ -11345,7 +11345,7 @@
             </a:r>
             <a:r>
               <a:rPr/>
-              <a:t> — a drive dies in service. Callout, rebuild, risk, €2,600</a:t>
+              <a:t>: a drive dies in service. Callout, rebuild, risk, €2,600</a:t>
             </a:r>
           </a:p>
         </p:txBody>
@@ -11515,7 +11515,7 @@
             </a:r>
             <a:r>
               <a:rPr/>
-              <a:t> — of 56 drives flagged, 43 really failed</a:t>
+              <a:t>: of 56 drives flagged, 43 really failed</a:t>
             </a:r>
           </a:p>
           <a:p>
@@ -11530,14 +11530,14 @@
             </a:r>
             <a:r>
               <a:rPr/>
-              <a:t> — of 76 drives that failed, we found 43</a:t>
+              <a:t>: of 76 drives that failed, we found 43</a:t>
             </a:r>
           </a:p>
           <a:p>
             <a:pPr lvl="0"/>
             <a:r>
               <a:rPr/>
-              <a:t>Specificity 0.993 — of 1,924 healthy drives, we left 1,911 alone</a:t>
+              <a:t>Specificity 0.993: of 1,924 healthy drives, we left 1,911 alone</a:t>
             </a:r>
           </a:p>
         </p:txBody>
@@ -11873,7 +11873,7 @@
             </a:r>
             <a:r>
               <a:rPr/>
-              <a:t> — dominated by the healthy class</a:t>
+              <a:t> (dominated by the healthy class)</a:t>
             </a:r>
           </a:p>
           <a:p>
@@ -11894,7 +11894,7 @@
             </a:r>
             <a:r>
               <a:rPr/>
-              <a:t> — both classes get an equal say</a:t>
+              <a:t> (both classes get an equal say)</a:t>
             </a:r>
           </a:p>
         </p:txBody>
@@ -11988,7 +11988,7 @@
             <a:pPr lvl="0"/>
             <a:r>
               <a:rPr/>
-              <a:t>Precision, recall, F1 — and the threshold nobody chose</a:t>
+              <a:t>Precision, recall, F1, and the threshold nobody chose</a:t>
             </a:r>
           </a:p>
           <a:p>
@@ -13067,7 +13067,7 @@
             <a:pPr lvl="0"/>
             <a:r>
               <a:rPr/>
-              <a:t>We keep evaluating at one threshold — but which?</a:t>
+              <a:t>We keep evaluating at one threshold, but which?</a:t>
             </a:r>
           </a:p>
           <a:p>
@@ -13516,7 +13516,7 @@
             </a:r>
             <a:r>
               <a:rPr/>
-              <a:t> — an enormous, growing denominator</a:t>
+              <a:t>: an enormous, growing denominator</a:t>
             </a:r>
           </a:p>
           <a:p>
@@ -13531,7 +13531,7 @@
             </a:r>
             <a:r>
               <a:rPr/>
-              <a:t> — where the false ones dominate</a:t>
+              <a:t>, where the false ones dominate</a:t>
             </a:r>
           </a:p>
         </p:txBody>
@@ -13717,7 +13717,7 @@
             <a:pPr lvl="0"/>
             <a:r>
               <a:rPr/>
-              <a:t>Never instead of it — and never AUC alone</a:t>
+              <a:t>Never instead of it, and never AUC alone</a:t>
             </a:r>
           </a:p>
         </p:txBody>
@@ -14750,7 +14750,7 @@
             </a:r>
             <a:r>
               <a:rPr/>
-              <a:t> — and it has a formula</a:t>
+              <a:t>, and it has a formula</a:t>
             </a:r>
           </a:p>
           <a:p>
@@ -14943,7 +14943,7 @@
             <a:pPr lvl="0"/>
             <a:r>
               <a:rPr/>
-              <a:t>Six SMART counters each — Self-Monitoring, Analysis and Reporting Technology</a:t>
+              <a:t>Six SMART counters each: Self-Monitoring, Analysis and Reporting Technology</a:t>
             </a:r>
           </a:p>
           <a:p>

--- a/Lessons/04_classification_and_metrics/Slides/classification_and_metrics_slides.pptx
+++ b/Lessons/04_classification_and_metrics/Slides/classification_and_metrics_slides.pptx
@@ -11241,8 +11241,8 @@
         </p:blipFill>
         <p:spPr bwMode="auto">
           <a:xfrm>
-            <a:off x="632911" y="1166099"/>
-            <a:ext cx="7878177" cy="3360181"/>
+            <a:off x="658081" y="1166099"/>
+            <a:ext cx="7827837" cy="3360181"/>
           </a:xfrm>
           <a:prstGeom prst="rect">
             <a:avLst/>

--- a/Lessons/04_classification_and_metrics/Slides/classification_and_metrics_slides.pptx
+++ b/Lessons/04_classification_and_metrics/Slides/classification_and_metrics_slides.pptx
@@ -10372,7 +10372,7 @@
             </a:pPr>
             <a:r>
               <a:rPr/>
-              <a:t>So why not squared error</a:t>
+              <a:t>So why not squared error?</a:t>
             </a:r>
           </a:p>
         </p:txBody>

--- a/Lessons/04_classification_and_metrics/Slides/classification_and_metrics_slides.pptx
+++ b/Lessons/04_classification_and_metrics/Slides/classification_and_metrics_slides.pptx
@@ -5510,7 +5510,7 @@
             </a:pPr>
             <a:r>
               <a:rPr/>
-              <a:t>Set it explicitly and say the deadline out loud: next Friday, 23 October.</a:t>
+              <a:t>Set it explicitly and say the deadline out loud: next Friday, 23 October, 09:00, before lesson 5 starts.</a:t>
             </a:r>
           </a:p>
           <a:p>
@@ -14845,7 +14845,11 @@
             </a:r>
             <a:r>
               <a:rPr/>
-              <a:t>, due Friday 23 October</a:t>
+              <a:t>, due </a:t>
+            </a:r>
+            <a:r>
+              <a:rPr b="1"/>
+              <a:t>Friday 23 October 2026, 09:00</a:t>
             </a:r>
           </a:p>
           <a:p>

--- a/Lessons/04_classification_and_metrics/Slides/classification_and_metrics_slides.pptx
+++ b/Lessons/04_classification_and_metrics/Slides/classification_and_metrics_slides.pptx
@@ -572,7 +572,7 @@
             </a:pPr>
             <a:r>
               <a:rPr/>
-              <a:t>Collect exercise 3. If you have looked at any of it, name the recurring mistake rather than praising the good answers - it is worth more to the room.</a:t>
+              <a:t>Nothing to collect. Ask who chose which penalty and why, and name the recurring mistake rather than praising the good answers - it is worth more to the room.</a:t>
             </a:r>
           </a:p>
           <a:p>
@@ -4808,7 +4808,7 @@
             </a:pPr>
             <a:r>
               <a:rPr/>
-              <a:t>Say this out loud rather than leaving it in the handout, because it is the same mistake you may have just returned to them on exercise 3.</a:t>
+              <a:t>Say this out loud rather than leaving it in the handout, because it is the same mistake you may have just named to them, this morning, on exercise 3.</a:t>
             </a:r>
           </a:p>
           <a:p>
@@ -5510,7 +5510,7 @@
             </a:pPr>
             <a:r>
               <a:rPr/>
-              <a:t>Set it explicitly and say the deadline out loud: next Friday, 23 October, 09:00, before lesson 5 starts.</a:t>
+              <a:t>Set it explicitly and say out loud when it comes back: the first ten minutes of next Friday, 23 October.</a:t>
             </a:r>
           </a:p>
           <a:p>
@@ -10664,7 +10664,7 @@
             <a:pPr lvl="0"/>
             <a:r>
               <a:rPr/>
-              <a:t>Exercise 3 was due today</a:t>
+              <a:t>Exercise 3, which we discuss now</a:t>
             </a:r>
           </a:p>
           <a:p>
@@ -14845,11 +14845,11 @@
             </a:r>
             <a:r>
               <a:rPr/>
-              <a:t>, due </a:t>
+              <a:t>, discussed at the start of </a:t>
             </a:r>
             <a:r>
               <a:rPr b="1"/>
-              <a:t>Friday 23 October 2026, 09:00</a:t>
+              <a:t>Friday 23 October</a:t>
             </a:r>
           </a:p>
           <a:p>

--- a/Lessons/04_classification_and_metrics/Slides/classification_and_metrics_slides.pptx
+++ b/Lessons/04_classification_and_metrics/Slides/classification_and_metrics_slides.pptx
@@ -9439,7 +9439,7 @@
           </p:nvPr>
         </p:nvGraphicFramePr>
         <p:xfrm>
-          <a:off x="457200" y="1193800"/>
+          <a:off x="457200" y="1166099"/>
           <a:ext cx="8229600" cy="3390900"/>
         </p:xfrm>
         <a:graphic>
@@ -10229,8 +10229,8 @@
         </p:blipFill>
         <p:spPr bwMode="auto">
           <a:xfrm>
-            <a:off x="457200" y="2357239"/>
-            <a:ext cx="8229600" cy="977900"/>
+            <a:off x="457200" y="2382639"/>
+            <a:ext cx="8229600" cy="927100"/>
           </a:xfrm>
           <a:prstGeom prst="rect">
             <a:avLst/>
@@ -10311,8 +10311,8 @@
         </p:blipFill>
         <p:spPr bwMode="auto">
           <a:xfrm>
-            <a:off x="457200" y="1792089"/>
-            <a:ext cx="8229600" cy="2108200"/>
+            <a:off x="591303" y="1869444"/>
+            <a:ext cx="7961393" cy="1953490"/>
           </a:xfrm>
           <a:prstGeom prst="rect">
             <a:avLst/>
@@ -10901,7 +10901,7 @@
           </p:nvPr>
         </p:nvGraphicFramePr>
         <p:xfrm>
-          <a:off x="457200" y="1193800"/>
+          <a:off x="457200" y="1166099"/>
           <a:ext cx="8229600" cy="3390900"/>
         </p:xfrm>
         <a:graphic>
@@ -11605,7 +11605,7 @@
           </p:nvPr>
         </p:nvGraphicFramePr>
         <p:xfrm>
-          <a:off x="457200" y="1193800"/>
+          <a:off x="457200" y="1166099"/>
           <a:ext cx="8229600" cy="3390900"/>
         </p:xfrm>
         <a:graphic>
@@ -11615,11 +11615,11 @@
                 <a:tableStyleId>{5C22544A-7EE6-4342-B048-85BDC9FD1C3A}</a:tableStyleId>
               </a:tblPr>
               <a:tblGrid>
-                <a:gridCol w="1638300"/>
-                <a:gridCol w="1638300"/>
-                <a:gridCol w="1638300"/>
-                <a:gridCol w="1638300"/>
-                <a:gridCol w="1638300"/>
+                <a:gridCol w="1645920"/>
+                <a:gridCol w="1645920"/>
+                <a:gridCol w="1645920"/>
+                <a:gridCol w="1645920"/>
+                <a:gridCol w="1645920"/>
               </a:tblGrid>
               <a:tr h="0">
                 <a:tc>
@@ -12239,7 +12239,7 @@
           </p:nvPr>
         </p:nvGraphicFramePr>
         <p:xfrm>
-          <a:off x="457200" y="1193800"/>
+          <a:off x="457200" y="1166099"/>
           <a:ext cx="8229600" cy="3390900"/>
         </p:xfrm>
         <a:graphic>
@@ -12249,13 +12249,13 @@
                 <a:tableStyleId>{5C22544A-7EE6-4342-B048-85BDC9FD1C3A}</a:tableStyleId>
               </a:tblPr>
               <a:tblGrid>
-                <a:gridCol w="1168400"/>
-                <a:gridCol w="1168400"/>
-                <a:gridCol w="1168400"/>
-                <a:gridCol w="1168400"/>
-                <a:gridCol w="1168400"/>
-                <a:gridCol w="1168400"/>
-                <a:gridCol w="1168400"/>
+                <a:gridCol w="1175657"/>
+                <a:gridCol w="1175657"/>
+                <a:gridCol w="1175657"/>
+                <a:gridCol w="1175657"/>
+                <a:gridCol w="1175657"/>
+                <a:gridCol w="1175657"/>
+                <a:gridCol w="1175658"/>
               </a:tblGrid>
               <a:tr h="0">
                 <a:tc>
@@ -13872,8 +13872,8 @@
         </p:blipFill>
         <p:spPr bwMode="auto">
           <a:xfrm>
-            <a:off x="457204" y="2369940"/>
-            <a:ext cx="8229591" cy="952499"/>
+            <a:off x="457200" y="2414389"/>
+            <a:ext cx="8229600" cy="863600"/>
           </a:xfrm>
           <a:prstGeom prst="rect">
             <a:avLst/>
@@ -14040,7 +14040,7 @@
           </p:nvPr>
         </p:nvGraphicFramePr>
         <p:xfrm>
-          <a:off x="457200" y="1193800"/>
+          <a:off x="457200" y="1166099"/>
           <a:ext cx="8229600" cy="3390900"/>
         </p:xfrm>
         <a:graphic>
@@ -14050,11 +14050,11 @@
                 <a:tableStyleId>{5C22544A-7EE6-4342-B048-85BDC9FD1C3A}</a:tableStyleId>
               </a:tblPr>
               <a:tblGrid>
-                <a:gridCol w="1638300"/>
-                <a:gridCol w="1638300"/>
-                <a:gridCol w="1638300"/>
-                <a:gridCol w="1638300"/>
-                <a:gridCol w="1638300"/>
+                <a:gridCol w="1645920"/>
+                <a:gridCol w="1645920"/>
+                <a:gridCol w="1645920"/>
+                <a:gridCol w="1645920"/>
+                <a:gridCol w="1645920"/>
               </a:tblGrid>
               <a:tr h="0">
                 <a:tc>
@@ -15282,8 +15282,8 @@
         </p:blipFill>
         <p:spPr bwMode="auto">
           <a:xfrm>
-            <a:off x="457200" y="2515989"/>
-            <a:ext cx="8229600" cy="660400"/>
+            <a:off x="457200" y="2554089"/>
+            <a:ext cx="8229600" cy="584200"/>
           </a:xfrm>
           <a:prstGeom prst="rect">
             <a:avLst/>

--- a/Lessons/04_classification_and_metrics/Slides/classification_and_metrics_slides.pptx
+++ b/Lessons/04_classification_and_metrics/Slides/classification_and_metrics_slides.pptx
@@ -10311,8 +10311,8 @@
         </p:blipFill>
         <p:spPr bwMode="auto">
           <a:xfrm>
-            <a:off x="591303" y="1869444"/>
-            <a:ext cx="7961393" cy="1953490"/>
+            <a:off x="631768" y="1861131"/>
+            <a:ext cx="7880464" cy="1970116"/>
           </a:xfrm>
           <a:prstGeom prst="rect">
             <a:avLst/>
@@ -13872,8 +13872,8 @@
         </p:blipFill>
         <p:spPr bwMode="auto">
           <a:xfrm>
-            <a:off x="457200" y="2414389"/>
-            <a:ext cx="8229600" cy="863600"/>
+            <a:off x="457204" y="2363590"/>
+            <a:ext cx="8229591" cy="965199"/>
           </a:xfrm>
           <a:prstGeom prst="rect">
             <a:avLst/>
@@ -15282,8 +15282,8 @@
         </p:blipFill>
         <p:spPr bwMode="auto">
           <a:xfrm>
-            <a:off x="457200" y="2554089"/>
-            <a:ext cx="8229600" cy="584200"/>
+            <a:off x="457200" y="2535039"/>
+            <a:ext cx="8229600" cy="622300"/>
           </a:xfrm>
           <a:prstGeom prst="rect">
             <a:avLst/>

--- a/Lessons/04_classification_and_metrics/Slides/classification_and_metrics_slides.pptx
+++ b/Lessons/04_classification_and_metrics/Slides/classification_and_metrics_slides.pptx
@@ -1116,6 +1116,20 @@
         <p:txBody>
           <a:bodyPr/>
           <a:lstStyle/>
+          <a:p>
+            <a:pPr lvl="0" indent="0" marL="0">
+              <a:buNone/>
+            </a:pPr>
+            <a:r>
+              <a:rPr/>
+              <a:t>This is the loss on ONE example, L, not the cost over the training set. Say the missing half rather than showing it: the cost J is the average of this over the m examples, one over m times the sum. Written out in full the formula reached the slide edge and came out at 26pt, smaller than the bullets on the slide before it.</a:t>
+            </a:r>
+          </a:p>
+          <a:p>
+            <a:pPr lvl="0" indent="0" marL="0">
+              <a:buNone/>
+            </a:pPr>
+          </a:p>
           <a:p>
             <a:pPr lvl="0" indent="0" marL="0">
               <a:buNone/>
@@ -10215,7 +10229,7 @@
       </p:sp>
       <p:pic>
         <p:nvPicPr>
-          <p:cNvPr descr="eq_96491a8901.png" id="0" name="Picture 1"/>
+          <p:cNvPr descr="eq_9de37afc79.png" id="0" name="Picture 1"/>
           <p:cNvPicPr>
             <a:picLocks noGrp="1" noChangeAspect="1"/>
           </p:cNvPicPr>
@@ -10229,8 +10243,8 @@
         </p:blipFill>
         <p:spPr bwMode="auto">
           <a:xfrm>
-            <a:off x="457200" y="2382639"/>
-            <a:ext cx="8229600" cy="927100"/>
+            <a:off x="457200" y="2560439"/>
+            <a:ext cx="8229600" cy="571500"/>
           </a:xfrm>
           <a:prstGeom prst="rect">
             <a:avLst/>
